--- a/thesis/defense-presentation.pptx
+++ b/thesis/defense-presentation.pptx
@@ -26,6 +26,7 @@
     <p:sldId id="274" r:id="rId26"/>
     <p:sldId id="275" r:id="rId27"/>
     <p:sldId id="276" r:id="rId28"/>
+    <p:sldId id="277" r:id="rId29"/>
   </p:sldIdLst>
   <p:sldSz cx="12191695" cy="6858000" type="screen4x3"/>
   <p:notesSz cx="6858000" cy="9144000"/>
@@ -1676,7 +1677,7 @@
           <a:lstStyle/>
           <a:p>
             <a:r>
-              <a:t>محدودیت‌ها را صادقانه بیان کنید؛ این نشانهٔ تسلط بر کار است.</a:t>
+              <a:t>یادآوری پایین است و باید صادقانه گفته شود: برچسب دیویگن بسیار گسترده‌تر از جریان‌های داده‌ای است که این موتور مدل می‌کند. عدد معنادار، دقت و مقایسه با فلاوندر است.</a:t>
             </a:r>
           </a:p>
         </p:txBody>
@@ -1746,7 +1747,7 @@
           <a:lstStyle/>
           <a:p>
             <a:r>
-              <a:t>مسیر روشن و مبتنی بر یافته‌ها.</a:t>
+              <a:t>محدودیت‌ها را صادقانه بیان کنید؛ این نشانهٔ تسلط بر کار است.</a:t>
             </a:r>
           </a:p>
         </p:txBody>
@@ -1886,7 +1887,7 @@
           <a:lstStyle/>
           <a:p>
             <a:r>
-              <a:t>جملهٔ پایانی پیش از اسلاید تشکر.</a:t>
+              <a:t>مسیر روشن و مبتنی بر یافته‌ها.</a:t>
             </a:r>
           </a:p>
         </p:txBody>
@@ -1956,6 +1957,76 @@
           <a:lstStyle/>
           <a:p>
             <a:r>
+              <a:t>جملهٔ پایانی پیش از اسلاید تشکر.</a:t>
+            </a:r>
+          </a:p>
+        </p:txBody>
+      </p:sp>
+      <p:sp>
+        <p:nvSpPr>
+          <p:cNvPr id="4" name="Slide Number Placeholder 3"/>
+          <p:cNvSpPr>
+            <a:spLocks noGrp="1"/>
+          </p:cNvSpPr>
+          <p:nvPr>
+            <p:ph type="sldNum" idx="5" sz="quarter"/>
+          </p:nvPr>
+        </p:nvSpPr>
+        <p:spPr/>
+      </p:sp>
+    </p:spTree>
+  </p:cSld>
+  <p:clrMapOvr>
+    <a:masterClrMapping/>
+  </p:clrMapOvr>
+</p:notes>
+</file>
+
+<file path=ppt/notesSlides/notesSlide22.xml><?xml version="1.0" encoding="utf-8"?>
+<p:notes xmlns:a="http://schemas.openxmlformats.org/drawingml/2006/main" xmlns:p="http://schemas.openxmlformats.org/presentationml/2006/main" xmlns:r="http://schemas.openxmlformats.org/officeDocument/2006/relationships">
+  <p:cSld>
+    <p:spTree>
+      <p:nvGrpSpPr>
+        <p:cNvPr id="1" name=""/>
+        <p:cNvGrpSpPr/>
+        <p:nvPr/>
+      </p:nvGrpSpPr>
+      <p:grpSpPr>
+        <a:xfrm>
+          <a:off x="0" y="0"/>
+          <a:ext cx="0" cy="0"/>
+          <a:chOff x="0" y="0"/>
+          <a:chExt cx="0" cy="0"/>
+        </a:xfrm>
+      </p:grpSpPr>
+      <p:sp>
+        <p:nvSpPr>
+          <p:cNvPr id="2" name="Slide Image Placeholder 1"/>
+          <p:cNvSpPr>
+            <a:spLocks noGrp="1"/>
+          </p:cNvSpPr>
+          <p:nvPr>
+            <p:ph type="sldImg" idx="2"/>
+          </p:nvPr>
+        </p:nvSpPr>
+        <p:spPr/>
+      </p:sp>
+      <p:sp>
+        <p:nvSpPr>
+          <p:cNvPr id="3" name="Notes Placeholder 2"/>
+          <p:cNvSpPr>
+            <a:spLocks noGrp="1"/>
+          </p:cNvSpPr>
+          <p:nvPr>
+            <p:ph type="body" idx="3" sz="quarter"/>
+          </p:nvPr>
+        </p:nvSpPr>
+        <p:spPr/>
+        <p:txBody>
+          <a:bodyPr/>
+          <a:lstStyle/>
+          <a:p>
+            <a:r>
               <a:t>فضای باقی‌مانده برای پرسش‌های هیئت‌مجازه.</a:t>
             </a:r>
           </a:p>
@@ -2236,7 +2307,7 @@
           <a:lstStyle/>
           <a:p>
             <a:r>
-              <a:t>برای هر فاز حدود یک دقیقه؛ روی جریان داده تأکید کنید.</a:t>
+              <a:t>برای هر فاز حدود یک دقیقه؛ روی جریان داده و تفکیک نقش Scanner از Verifier تأکید کنید.</a:t>
             </a:r>
           </a:p>
         </p:txBody>
@@ -2446,7 +2517,7 @@
           <a:lstStyle/>
           <a:p>
             <a:r>
-              <a:t>عدم قطعیت یک قابلیت است، نه ضعف: عامل وانمود نمی‌کند که شاهد دارد.</a:t>
+              <a:t>تفکیک نقش‌ها باعث می‌شود Verifier نتواند صرفاً بر اساس عنوان هشدار قضاوت کند.</a:t>
             </a:r>
           </a:p>
         </p:txBody>
@@ -5527,13 +5598,13 @@
               </a:spcAft>
             </a:pPr>
             <a:r>
-              <a:rPr sz="3400" b="1">
+              <a:rPr sz="3000" b="1">
                 <a:solidFill>
                   <a:srgbClr val="FFFFFF"/>
                 </a:solidFill>
                 <a:latin typeface="Tahoma"/>
               </a:rPr>
-              <a:t>کاهش هشدارهای نادرست ابزارهای تحلیل ایستا</a:t>
+              <a:t>ترکیب تحلیل ساختاری کد با استدلال مدل‌های زبانی بزرگ</a:t>
             </a:r>
           </a:p>
         </p:txBody>
@@ -5546,7 +5617,7 @@
         </p:nvSpPr>
         <p:spPr>
           <a:xfrm>
-            <a:off x="566928" y="2651760"/>
+            <a:off x="566928" y="2514600"/>
             <a:ext cx="11057839" cy="914400"/>
           </a:xfrm>
           <a:prstGeom prst="rect">
@@ -5569,13 +5640,13 @@
               </a:spcAft>
             </a:pPr>
             <a:r>
-              <a:rPr sz="2200" b="0">
+              <a:rPr sz="2400" b="0">
                 <a:solidFill>
                   <a:srgbClr val="E3EFF6"/>
                 </a:solidFill>
                 <a:latin typeface="Tahoma"/>
               </a:rPr>
-              <a:t>به کمک بازبینی مبتنی بر شواهد با عامل زبانی</a:t>
+              <a:t>و معماری چندعامله برای کاهش هشدارهای کاذب</a:t>
             </a:r>
           </a:p>
         </p:txBody>
@@ -5617,7 +5688,7 @@
                 </a:solidFill>
                 <a:latin typeface="Tahoma"/>
               </a:rPr>
-              <a:t>دانشکده مهندسی کامپیوتر، دانشگاه تهران</a:t>
+              <a:t>دانشکده مهندسی کامپیوتر، دانشگاه صنعتی امیرکبیر</a:t>
             </a:r>
           </a:p>
         </p:txBody>
@@ -5659,7 +5730,8 @@
                 </a:solidFill>
                 <a:latin typeface="Tahoma"/>
               </a:rPr>
-              <a:t>نگارنده: امیرحسین قدیری        استاد راهنما: دکتر مهران سلیمان فالح        تابستان ۱۴۰۴</a:t>
+              <a:t>نگارنده: علی ناصری‌نیا (۴۰۱۳۱۰۵۳)
+استاد راهنما: حمیدرضا شهریاری‌کاهکشی        نیمسال اول ۱۴۰۴</a:t>
             </a:r>
           </a:p>
         </p:txBody>
@@ -6191,6 +6263,25 @@
                 <a:latin typeface="Tahoma"/>
               </a:rPr>
               <a:t>•  زیرمجموعهٔ لایه‌بندی‌شده از جولیت با بذر ثابت: ۶۰۰ فایل = ۳۰۰ آسیب‌پذیر و ۳۰۰ سالم، در دو نوع سرریز بافر و سرریز عدد صحیح.</a:t>
+            </a:r>
+          </a:p>
+          <a:p>
+            <a:pPr rtl="1" algn="r">
+              <a:lnSpc>
+                <a:spcPct val="140000"/>
+              </a:lnSpc>
+              <a:spcAft>
+                <a:spcPts val="1200"/>
+              </a:spcAft>
+            </a:pPr>
+            <a:r>
+              <a:rPr sz="1700">
+                <a:solidFill>
+                  <a:srgbClr val="1B263B"/>
+                </a:solidFill>
+                <a:latin typeface="Tahoma"/>
+              </a:rPr>
+              <a:t>•  این ۶۰۰ فایل تقریباً نیمی C و نیمی ++C است؛ گزارش نتایج به تفکیک زبان ارائه می‌شود.</a:t>
             </a:r>
           </a:p>
           <a:p>
@@ -9766,7 +9857,7 @@
                 </a:solidFill>
                 <a:latin typeface="Tahoma"/>
               </a:rPr>
-              <a:t>محدودیت‌ها</a:t>
+              <a:t>شواهد روی کد واقعی</a:t>
             </a:r>
           </a:p>
         </p:txBody>
@@ -9779,7 +9870,42 @@
         </p:nvSpPr>
         <p:spPr>
           <a:xfrm>
-            <a:off x="566928" y="1600200"/>
+            <a:off x="566928" y="969264"/>
+            <a:ext cx="11057839" cy="365760"/>
+          </a:xfrm>
+          <a:prstGeom prst="rect">
+            <a:avLst/>
+          </a:prstGeom>
+          <a:noFill/>
+        </p:spPr>
+        <p:txBody>
+          <a:bodyPr wrap="square">
+            <a:spAutoFit/>
+          </a:bodyPr>
+          <a:lstStyle/>
+          <a:p>
+            <a:pPr rtl="1" algn="r"/>
+            <a:r>
+              <a:rPr sz="1400">
+                <a:solidFill>
+                  <a:srgbClr val="6B7484"/>
+                </a:solidFill>
+                <a:latin typeface="Tahoma"/>
+              </a:rPr>
+              <a:t>مجموعه‌دادهٔ دیویگن: ۲۷٬۲۵۸ تابع C از qemu و FFmpeg</a:t>
+            </a:r>
+          </a:p>
+        </p:txBody>
+      </p:sp>
+      <p:sp>
+        <p:nvSpPr>
+          <p:cNvPr id="5" name="TextBox 4"/>
+          <p:cNvSpPr txBox="1"/>
+          <p:nvPr/>
+        </p:nvSpPr>
+        <p:spPr>
+          <a:xfrm>
+            <a:off x="566928" y="1554480"/>
             <a:ext cx="11057839" cy="4"/>
           </a:xfrm>
           <a:prstGeom prst="rect">
@@ -9808,7 +9934,7 @@
                 </a:solidFill>
                 <a:latin typeface="Tahoma"/>
               </a:rPr>
-              <a:t>•  اندازهٔ نمونه: تعداد یافته‌های درست در پیکربندی‌های ترکیبی کوچک است (۳ تا ۵)، پس نرخ‌ها حساس‌اند.</a:t>
+              <a:t>•  تا اینجا همهٔ ارزیابی روی جولیت بود؛ قالب‌های تولیدشده و نه کد واقعی.</a:t>
             </a:r>
           </a:p>
           <a:p>
@@ -9827,7 +9953,7 @@
                 </a:solidFill>
                 <a:latin typeface="Tahoma"/>
               </a:rPr>
-              <a:t>•  مجموعه‌داده: کد جولیت قالب‌محور و کوتاه است؛ بازبینی روی کد واقعی و بزرگ سخت‌تر خواهد بود.</a:t>
+              <a:t>•  دیویگن کد واقعی پروژه‌هاست: هر تابع با برچسب «در یک وصلهٔ امنیتی دست‌کاری شده».</a:t>
             </a:r>
           </a:p>
           <a:p>
@@ -9846,39 +9972,796 @@
                 </a:solidFill>
                 <a:latin typeface="Tahoma"/>
               </a:rPr>
-              <a:t>•  مدل: ارزیابی تنها روی یک مدل زبانی انجام شده و تعمیم نیازمند آزمایش تکمیلی است.</a:t>
-            </a:r>
-          </a:p>
-          <a:p>
-            <a:pPr rtl="1" algn="r">
-              <a:lnSpc>
-                <a:spcPct val="140000"/>
-              </a:lnSpc>
-              <a:spcAft>
-                <a:spcPts val="1200"/>
-              </a:spcAft>
-            </a:pPr>
-            <a:r>
-              <a:rPr sz="1700">
-                <a:solidFill>
-                  <a:srgbClr val="1B263B"/>
-                </a:solidFill>
-                <a:latin typeface="Tahoma"/>
-              </a:rPr>
-              <a:t>•  سیاست تطبیق: چون برچسب خط در مجموعه‌داده ثبت نشده، تطبیق بر پایهٔ فایل و خانوادهٔ CWE است و تا حدی سخاوتمندانه.</a:t>
-            </a:r>
-          </a:p>
-        </p:txBody>
-      </p:sp>
-      <p:sp>
-        <p:nvSpPr>
-          <p:cNvPr id="5" name="Rounded Rectangle 4"/>
+              <a:t>•  برای پرهیز از آلودگی ارزیابی، هر ۲۷٬۲۵۸ تابع از پاک‌سازی عبور داده شد؛ هیچ نشانهٔ برچسبی باقی نماند.</a:t>
+            </a:r>
+          </a:p>
+        </p:txBody>
+      </p:sp>
+      <p:graphicFrame>
+        <p:nvGraphicFramePr>
+          <p:cNvPr id="6" name="Table 5"/>
+          <p:cNvGraphicFramePr>
+            <a:graphicFrameLocks noGrp="1"/>
+          </p:cNvGraphicFramePr>
+          <p:nvPr/>
+        </p:nvGraphicFramePr>
+        <p:xfrm>
+          <a:off x="566928" y="3566160"/>
+          <a:ext cx="11055096" cy="1920240"/>
+        </p:xfrm>
+        <a:graphic>
+          <a:graphicData uri="http://schemas.openxmlformats.org/drawingml/2006/table">
+            <a:tbl>
+              <a:tblPr firstRow="1" bandRow="1">
+                <a:tableStyleId>{5C22544A-7EE6-4342-B048-85BDC9FD1C3A}</a:tableStyleId>
+              </a:tblPr>
+              <a:tblGrid>
+                <a:gridCol w="1381887"/>
+                <a:gridCol w="1381887"/>
+                <a:gridCol w="1381887"/>
+                <a:gridCol w="1381887"/>
+                <a:gridCol w="1381887"/>
+                <a:gridCol w="1381887"/>
+                <a:gridCol w="1381887"/>
+                <a:gridCol w="1381887"/>
+              </a:tblGrid>
+              <a:tr h="480060">
+                <a:tc>
+                  <a:txBody>
+                    <a:bodyPr wrap="square"/>
+                    <a:lstStyle/>
+                    <a:p>
+                      <a:pPr rtl="1" algn="r"/>
+                      <a:r>
+                        <a:rPr sz="1300" b="1">
+                          <a:solidFill>
+                            <a:srgbClr val="FFFFFF"/>
+                          </a:solidFill>
+                          <a:latin typeface="Tahoma"/>
+                        </a:rPr>
+                        <a:t>پیکربندی</a:t>
+                      </a:r>
+                    </a:p>
+                  </a:txBody>
+                  <a:tcPr>
+                    <a:solidFill>
+                      <a:srgbClr val="0F628B"/>
+                    </a:solidFill>
+                  </a:tcPr>
+                </a:tc>
+                <a:tc>
+                  <a:txBody>
+                    <a:bodyPr wrap="square"/>
+                    <a:lstStyle/>
+                    <a:p>
+                      <a:pPr rtl="1" algn="r"/>
+                      <a:r>
+                        <a:rPr sz="1300" b="1">
+                          <a:solidFill>
+                            <a:srgbClr val="FFFFFF"/>
+                          </a:solidFill>
+                          <a:latin typeface="Tahoma"/>
+                        </a:rPr>
+                        <a:t>TP</a:t>
+                      </a:r>
+                    </a:p>
+                  </a:txBody>
+                  <a:tcPr>
+                    <a:solidFill>
+                      <a:srgbClr val="0F628B"/>
+                    </a:solidFill>
+                  </a:tcPr>
+                </a:tc>
+                <a:tc>
+                  <a:txBody>
+                    <a:bodyPr wrap="square"/>
+                    <a:lstStyle/>
+                    <a:p>
+                      <a:pPr rtl="1" algn="r"/>
+                      <a:r>
+                        <a:rPr sz="1300" b="1">
+                          <a:solidFill>
+                            <a:srgbClr val="FFFFFF"/>
+                          </a:solidFill>
+                          <a:latin typeface="Tahoma"/>
+                        </a:rPr>
+                        <a:t>FP</a:t>
+                      </a:r>
+                    </a:p>
+                  </a:txBody>
+                  <a:tcPr>
+                    <a:solidFill>
+                      <a:srgbClr val="0F628B"/>
+                    </a:solidFill>
+                  </a:tcPr>
+                </a:tc>
+                <a:tc>
+                  <a:txBody>
+                    <a:bodyPr wrap="square"/>
+                    <a:lstStyle/>
+                    <a:p>
+                      <a:pPr rtl="1" algn="r"/>
+                      <a:r>
+                        <a:rPr sz="1300" b="1">
+                          <a:solidFill>
+                            <a:srgbClr val="FFFFFF"/>
+                          </a:solidFill>
+                          <a:latin typeface="Tahoma"/>
+                        </a:rPr>
+                        <a:t>FN</a:t>
+                      </a:r>
+                    </a:p>
+                  </a:txBody>
+                  <a:tcPr>
+                    <a:solidFill>
+                      <a:srgbClr val="0F628B"/>
+                    </a:solidFill>
+                  </a:tcPr>
+                </a:tc>
+                <a:tc>
+                  <a:txBody>
+                    <a:bodyPr wrap="square"/>
+                    <a:lstStyle/>
+                    <a:p>
+                      <a:pPr rtl="1" algn="r"/>
+                      <a:r>
+                        <a:rPr sz="1300" b="1">
+                          <a:solidFill>
+                            <a:srgbClr val="FFFFFF"/>
+                          </a:solidFill>
+                          <a:latin typeface="Tahoma"/>
+                        </a:rPr>
+                        <a:t>TN</a:t>
+                      </a:r>
+                    </a:p>
+                  </a:txBody>
+                  <a:tcPr>
+                    <a:solidFill>
+                      <a:srgbClr val="0F628B"/>
+                    </a:solidFill>
+                  </a:tcPr>
+                </a:tc>
+                <a:tc>
+                  <a:txBody>
+                    <a:bodyPr wrap="square"/>
+                    <a:lstStyle/>
+                    <a:p>
+                      <a:pPr rtl="1" algn="r"/>
+                      <a:r>
+                        <a:rPr sz="1300" b="1">
+                          <a:solidFill>
+                            <a:srgbClr val="FFFFFF"/>
+                          </a:solidFill>
+                          <a:latin typeface="Tahoma"/>
+                        </a:rPr>
+                        <a:t>دقت</a:t>
+                      </a:r>
+                    </a:p>
+                  </a:txBody>
+                  <a:tcPr>
+                    <a:solidFill>
+                      <a:srgbClr val="0F628B"/>
+                    </a:solidFill>
+                  </a:tcPr>
+                </a:tc>
+                <a:tc>
+                  <a:txBody>
+                    <a:bodyPr wrap="square"/>
+                    <a:lstStyle/>
+                    <a:p>
+                      <a:pPr rtl="1" algn="r"/>
+                      <a:r>
+                        <a:rPr sz="1300" b="1">
+                          <a:solidFill>
+                            <a:srgbClr val="FFFFFF"/>
+                          </a:solidFill>
+                          <a:latin typeface="Tahoma"/>
+                        </a:rPr>
+                        <a:t>یادآوری</a:t>
+                      </a:r>
+                    </a:p>
+                  </a:txBody>
+                  <a:tcPr>
+                    <a:solidFill>
+                      <a:srgbClr val="0F628B"/>
+                    </a:solidFill>
+                  </a:tcPr>
+                </a:tc>
+                <a:tc>
+                  <a:txBody>
+                    <a:bodyPr wrap="square"/>
+                    <a:lstStyle/>
+                    <a:p>
+                      <a:pPr rtl="1" algn="r"/>
+                      <a:r>
+                        <a:rPr sz="1300" b="1">
+                          <a:solidFill>
+                            <a:srgbClr val="FFFFFF"/>
+                          </a:solidFill>
+                          <a:latin typeface="Tahoma"/>
+                        </a:rPr>
+                        <a:t>نرخ هشدار</a:t>
+                      </a:r>
+                    </a:p>
+                  </a:txBody>
+                  <a:tcPr>
+                    <a:solidFill>
+                      <a:srgbClr val="0F628B"/>
+                    </a:solidFill>
+                  </a:tcPr>
+                </a:tc>
+              </a:tr>
+              <a:tr h="480060">
+                <a:tc>
+                  <a:txBody>
+                    <a:bodyPr wrap="square"/>
+                    <a:lstStyle/>
+                    <a:p>
+                      <a:pPr rtl="1" algn="r"/>
+                      <a:r>
+                        <a:rPr sz="1300" b="0">
+                          <a:solidFill>
+                            <a:srgbClr val="1B263B"/>
+                          </a:solidFill>
+                          <a:latin typeface="Tahoma"/>
+                        </a:rPr>
+                        <a:t>مسیر بدون کنترل</a:t>
+                      </a:r>
+                    </a:p>
+                  </a:txBody>
+                  <a:tcPr>
+                    <a:solidFill>
+                      <a:srgbClr val="FFFFFF"/>
+                    </a:solidFill>
+                  </a:tcPr>
+                </a:tc>
+                <a:tc>
+                  <a:txBody>
+                    <a:bodyPr wrap="square"/>
+                    <a:lstStyle/>
+                    <a:p>
+                      <a:pPr rtl="1" algn="r"/>
+                      <a:r>
+                        <a:rPr sz="1300" b="0">
+                          <a:solidFill>
+                            <a:srgbClr val="1B263B"/>
+                          </a:solidFill>
+                          <a:latin typeface="Tahoma"/>
+                        </a:rPr>
+                        <a:t>861</a:t>
+                      </a:r>
+                    </a:p>
+                  </a:txBody>
+                  <a:tcPr>
+                    <a:solidFill>
+                      <a:srgbClr val="FFFFFF"/>
+                    </a:solidFill>
+                  </a:tcPr>
+                </a:tc>
+                <a:tc>
+                  <a:txBody>
+                    <a:bodyPr wrap="square"/>
+                    <a:lstStyle/>
+                    <a:p>
+                      <a:pPr rtl="1" algn="r"/>
+                      <a:r>
+                        <a:rPr sz="1300" b="0">
+                          <a:solidFill>
+                            <a:srgbClr val="1B263B"/>
+                          </a:solidFill>
+                          <a:latin typeface="Tahoma"/>
+                        </a:rPr>
+                        <a:t>783</a:t>
+                      </a:r>
+                    </a:p>
+                  </a:txBody>
+                  <a:tcPr>
+                    <a:solidFill>
+                      <a:srgbClr val="FFFFFF"/>
+                    </a:solidFill>
+                  </a:tcPr>
+                </a:tc>
+                <a:tc>
+                  <a:txBody>
+                    <a:bodyPr wrap="square"/>
+                    <a:lstStyle/>
+                    <a:p>
+                      <a:pPr rtl="1" algn="r"/>
+                      <a:r>
+                        <a:rPr sz="1300" b="0">
+                          <a:solidFill>
+                            <a:srgbClr val="1B263B"/>
+                          </a:solidFill>
+                          <a:latin typeface="Tahoma"/>
+                        </a:rPr>
+                        <a:t>11564</a:t>
+                      </a:r>
+                    </a:p>
+                  </a:txBody>
+                  <a:tcPr>
+                    <a:solidFill>
+                      <a:srgbClr val="FFFFFF"/>
+                    </a:solidFill>
+                  </a:tcPr>
+                </a:tc>
+                <a:tc>
+                  <a:txBody>
+                    <a:bodyPr wrap="square"/>
+                    <a:lstStyle/>
+                    <a:p>
+                      <a:pPr rtl="1" algn="r"/>
+                      <a:r>
+                        <a:rPr sz="1300" b="0">
+                          <a:solidFill>
+                            <a:srgbClr val="1B263B"/>
+                          </a:solidFill>
+                          <a:latin typeface="Tahoma"/>
+                        </a:rPr>
+                        <a:t>14050</a:t>
+                      </a:r>
+                    </a:p>
+                  </a:txBody>
+                  <a:tcPr>
+                    <a:solidFill>
+                      <a:srgbClr val="FFFFFF"/>
+                    </a:solidFill>
+                  </a:tcPr>
+                </a:tc>
+                <a:tc>
+                  <a:txBody>
+                    <a:bodyPr wrap="square"/>
+                    <a:lstStyle/>
+                    <a:p>
+                      <a:pPr rtl="1" algn="r"/>
+                      <a:r>
+                        <a:rPr sz="1300" b="0">
+                          <a:solidFill>
+                            <a:srgbClr val="1B263B"/>
+                          </a:solidFill>
+                          <a:latin typeface="Tahoma"/>
+                        </a:rPr>
+                        <a:t>0.524</a:t>
+                      </a:r>
+                    </a:p>
+                  </a:txBody>
+                  <a:tcPr>
+                    <a:solidFill>
+                      <a:srgbClr val="FFFFFF"/>
+                    </a:solidFill>
+                  </a:tcPr>
+                </a:tc>
+                <a:tc>
+                  <a:txBody>
+                    <a:bodyPr wrap="square"/>
+                    <a:lstStyle/>
+                    <a:p>
+                      <a:pPr rtl="1" algn="r"/>
+                      <a:r>
+                        <a:rPr sz="1300" b="0">
+                          <a:solidFill>
+                            <a:srgbClr val="1B263B"/>
+                          </a:solidFill>
+                          <a:latin typeface="Tahoma"/>
+                        </a:rPr>
+                        <a:t>0.069</a:t>
+                      </a:r>
+                    </a:p>
+                  </a:txBody>
+                  <a:tcPr>
+                    <a:solidFill>
+                      <a:srgbClr val="FFFFFF"/>
+                    </a:solidFill>
+                  </a:tcPr>
+                </a:tc>
+                <a:tc>
+                  <a:txBody>
+                    <a:bodyPr wrap="square"/>
+                    <a:lstStyle/>
+                    <a:p>
+                      <a:pPr rtl="1" algn="r"/>
+                      <a:r>
+                        <a:rPr sz="1300" b="0">
+                          <a:solidFill>
+                            <a:srgbClr val="1B263B"/>
+                          </a:solidFill>
+                          <a:latin typeface="Tahoma"/>
+                        </a:rPr>
+                        <a:t>0.053</a:t>
+                      </a:r>
+                    </a:p>
+                  </a:txBody>
+                  <a:tcPr>
+                    <a:solidFill>
+                      <a:srgbClr val="FFFFFF"/>
+                    </a:solidFill>
+                  </a:tcPr>
+                </a:tc>
+              </a:tr>
+              <a:tr h="480060">
+                <a:tc>
+                  <a:txBody>
+                    <a:bodyPr wrap="square"/>
+                    <a:lstStyle/>
+                    <a:p>
+                      <a:pPr rtl="1" algn="r"/>
+                      <a:r>
+                        <a:rPr sz="1300" b="0">
+                          <a:solidFill>
+                            <a:srgbClr val="1B263B"/>
+                          </a:solidFill>
+                          <a:latin typeface="Tahoma"/>
+                        </a:rPr>
+                        <a:t>فلاوندر (۶۰۰ متعادل)</a:t>
+                      </a:r>
+                    </a:p>
+                  </a:txBody>
+                  <a:tcPr>
+                    <a:solidFill>
+                      <a:srgbClr val="F6F8FA"/>
+                    </a:solidFill>
+                  </a:tcPr>
+                </a:tc>
+                <a:tc>
+                  <a:txBody>
+                    <a:bodyPr wrap="square"/>
+                    <a:lstStyle/>
+                    <a:p>
+                      <a:pPr rtl="1" algn="r"/>
+                      <a:r>
+                        <a:rPr sz="1300" b="0">
+                          <a:solidFill>
+                            <a:srgbClr val="1B263B"/>
+                          </a:solidFill>
+                          <a:latin typeface="Tahoma"/>
+                        </a:rPr>
+                        <a:t>6</a:t>
+                      </a:r>
+                    </a:p>
+                  </a:txBody>
+                  <a:tcPr>
+                    <a:solidFill>
+                      <a:srgbClr val="F6F8FA"/>
+                    </a:solidFill>
+                  </a:tcPr>
+                </a:tc>
+                <a:tc>
+                  <a:txBody>
+                    <a:bodyPr wrap="square"/>
+                    <a:lstStyle/>
+                    <a:p>
+                      <a:pPr rtl="1" algn="r"/>
+                      <a:r>
+                        <a:rPr sz="1300" b="0">
+                          <a:solidFill>
+                            <a:srgbClr val="1B263B"/>
+                          </a:solidFill>
+                          <a:latin typeface="Tahoma"/>
+                        </a:rPr>
+                        <a:t>11</a:t>
+                      </a:r>
+                    </a:p>
+                  </a:txBody>
+                  <a:tcPr>
+                    <a:solidFill>
+                      <a:srgbClr val="F6F8FA"/>
+                    </a:solidFill>
+                  </a:tcPr>
+                </a:tc>
+                <a:tc>
+                  <a:txBody>
+                    <a:bodyPr wrap="square"/>
+                    <a:lstStyle/>
+                    <a:p>
+                      <a:pPr rtl="1" algn="r"/>
+                      <a:r>
+                        <a:rPr sz="1300" b="0">
+                          <a:solidFill>
+                            <a:srgbClr val="1B263B"/>
+                          </a:solidFill>
+                          <a:latin typeface="Tahoma"/>
+                        </a:rPr>
+                        <a:t>294</a:t>
+                      </a:r>
+                    </a:p>
+                  </a:txBody>
+                  <a:tcPr>
+                    <a:solidFill>
+                      <a:srgbClr val="F6F8FA"/>
+                    </a:solidFill>
+                  </a:tcPr>
+                </a:tc>
+                <a:tc>
+                  <a:txBody>
+                    <a:bodyPr wrap="square"/>
+                    <a:lstStyle/>
+                    <a:p>
+                      <a:pPr rtl="1" algn="r"/>
+                      <a:r>
+                        <a:rPr sz="1300" b="0">
+                          <a:solidFill>
+                            <a:srgbClr val="1B263B"/>
+                          </a:solidFill>
+                          <a:latin typeface="Tahoma"/>
+                        </a:rPr>
+                        <a:t>289</a:t>
+                      </a:r>
+                    </a:p>
+                  </a:txBody>
+                  <a:tcPr>
+                    <a:solidFill>
+                      <a:srgbClr val="F6F8FA"/>
+                    </a:solidFill>
+                  </a:tcPr>
+                </a:tc>
+                <a:tc>
+                  <a:txBody>
+                    <a:bodyPr wrap="square"/>
+                    <a:lstStyle/>
+                    <a:p>
+                      <a:pPr rtl="1" algn="r"/>
+                      <a:r>
+                        <a:rPr sz="1300" b="0">
+                          <a:solidFill>
+                            <a:srgbClr val="1B263B"/>
+                          </a:solidFill>
+                          <a:latin typeface="Tahoma"/>
+                        </a:rPr>
+                        <a:t>0.353</a:t>
+                      </a:r>
+                    </a:p>
+                  </a:txBody>
+                  <a:tcPr>
+                    <a:solidFill>
+                      <a:srgbClr val="F6F8FA"/>
+                    </a:solidFill>
+                  </a:tcPr>
+                </a:tc>
+                <a:tc>
+                  <a:txBody>
+                    <a:bodyPr wrap="square"/>
+                    <a:lstStyle/>
+                    <a:p>
+                      <a:pPr rtl="1" algn="r"/>
+                      <a:r>
+                        <a:rPr sz="1300" b="0">
+                          <a:solidFill>
+                            <a:srgbClr val="1B263B"/>
+                          </a:solidFill>
+                          <a:latin typeface="Tahoma"/>
+                        </a:rPr>
+                        <a:t>0.020</a:t>
+                      </a:r>
+                    </a:p>
+                  </a:txBody>
+                  <a:tcPr>
+                    <a:solidFill>
+                      <a:srgbClr val="F6F8FA"/>
+                    </a:solidFill>
+                  </a:tcPr>
+                </a:tc>
+                <a:tc>
+                  <a:txBody>
+                    <a:bodyPr wrap="square"/>
+                    <a:lstStyle/>
+                    <a:p>
+                      <a:pPr rtl="1" algn="r"/>
+                      <a:r>
+                        <a:rPr sz="1300" b="0">
+                          <a:solidFill>
+                            <a:srgbClr val="1B263B"/>
+                          </a:solidFill>
+                          <a:latin typeface="Tahoma"/>
+                        </a:rPr>
+                        <a:t>0.037</a:t>
+                      </a:r>
+                    </a:p>
+                  </a:txBody>
+                  <a:tcPr>
+                    <a:solidFill>
+                      <a:srgbClr val="F6F8FA"/>
+                    </a:solidFill>
+                  </a:tcPr>
+                </a:tc>
+              </a:tr>
+              <a:tr h="480060">
+                <a:tc>
+                  <a:txBody>
+                    <a:bodyPr wrap="square"/>
+                    <a:lstStyle/>
+                    <a:p>
+                      <a:pPr rtl="1" algn="r"/>
+                      <a:r>
+                        <a:rPr sz="1300" b="0">
+                          <a:solidFill>
+                            <a:srgbClr val="1B263B"/>
+                          </a:solidFill>
+                          <a:latin typeface="Tahoma"/>
+                        </a:rPr>
+                        <a:t>اتحاد دو روش</a:t>
+                      </a:r>
+                    </a:p>
+                  </a:txBody>
+                  <a:tcPr>
+                    <a:solidFill>
+                      <a:srgbClr val="FFFFFF"/>
+                    </a:solidFill>
+                  </a:tcPr>
+                </a:tc>
+                <a:tc>
+                  <a:txBody>
+                    <a:bodyPr wrap="square"/>
+                    <a:lstStyle/>
+                    <a:p>
+                      <a:pPr rtl="1" algn="r"/>
+                      <a:r>
+                        <a:rPr sz="1300" b="0">
+                          <a:solidFill>
+                            <a:srgbClr val="1B263B"/>
+                          </a:solidFill>
+                          <a:latin typeface="Tahoma"/>
+                        </a:rPr>
+                        <a:t>20</a:t>
+                      </a:r>
+                    </a:p>
+                  </a:txBody>
+                  <a:tcPr>
+                    <a:solidFill>
+                      <a:srgbClr val="FFFFFF"/>
+                    </a:solidFill>
+                  </a:tcPr>
+                </a:tc>
+                <a:tc>
+                  <a:txBody>
+                    <a:bodyPr wrap="square"/>
+                    <a:lstStyle/>
+                    <a:p>
+                      <a:pPr rtl="1" algn="r"/>
+                      <a:r>
+                        <a:rPr sz="1300" b="0">
+                          <a:solidFill>
+                            <a:srgbClr val="1B263B"/>
+                          </a:solidFill>
+                          <a:latin typeface="Tahoma"/>
+                        </a:rPr>
+                        <a:t>29</a:t>
+                      </a:r>
+                    </a:p>
+                  </a:txBody>
+                  <a:tcPr>
+                    <a:solidFill>
+                      <a:srgbClr val="FFFFFF"/>
+                    </a:solidFill>
+                  </a:tcPr>
+                </a:tc>
+                <a:tc>
+                  <a:txBody>
+                    <a:bodyPr wrap="square"/>
+                    <a:lstStyle/>
+                    <a:p>
+                      <a:pPr rtl="1" algn="r"/>
+                      <a:r>
+                        <a:rPr sz="1300" b="0">
+                          <a:solidFill>
+                            <a:srgbClr val="1B263B"/>
+                          </a:solidFill>
+                          <a:latin typeface="Tahoma"/>
+                        </a:rPr>
+                        <a:t>280</a:t>
+                      </a:r>
+                    </a:p>
+                  </a:txBody>
+                  <a:tcPr>
+                    <a:solidFill>
+                      <a:srgbClr val="FFFFFF"/>
+                    </a:solidFill>
+                  </a:tcPr>
+                </a:tc>
+                <a:tc>
+                  <a:txBody>
+                    <a:bodyPr wrap="square"/>
+                    <a:lstStyle/>
+                    <a:p>
+                      <a:pPr rtl="1" algn="r"/>
+                      <a:r>
+                        <a:rPr sz="1300" b="0">
+                          <a:solidFill>
+                            <a:srgbClr val="1B263B"/>
+                          </a:solidFill>
+                          <a:latin typeface="Tahoma"/>
+                        </a:rPr>
+                        <a:t>271</a:t>
+                      </a:r>
+                    </a:p>
+                  </a:txBody>
+                  <a:tcPr>
+                    <a:solidFill>
+                      <a:srgbClr val="FFFFFF"/>
+                    </a:solidFill>
+                  </a:tcPr>
+                </a:tc>
+                <a:tc>
+                  <a:txBody>
+                    <a:bodyPr wrap="square"/>
+                    <a:lstStyle/>
+                    <a:p>
+                      <a:pPr rtl="1" algn="r"/>
+                      <a:r>
+                        <a:rPr sz="1300" b="0">
+                          <a:solidFill>
+                            <a:srgbClr val="1B263B"/>
+                          </a:solidFill>
+                          <a:latin typeface="Tahoma"/>
+                        </a:rPr>
+                        <a:t>0.408</a:t>
+                      </a:r>
+                    </a:p>
+                  </a:txBody>
+                  <a:tcPr>
+                    <a:solidFill>
+                      <a:srgbClr val="FFFFFF"/>
+                    </a:solidFill>
+                  </a:tcPr>
+                </a:tc>
+                <a:tc>
+                  <a:txBody>
+                    <a:bodyPr wrap="square"/>
+                    <a:lstStyle/>
+                    <a:p>
+                      <a:pPr rtl="1" algn="r"/>
+                      <a:r>
+                        <a:rPr sz="1300" b="0">
+                          <a:solidFill>
+                            <a:srgbClr val="1B263B"/>
+                          </a:solidFill>
+                          <a:latin typeface="Tahoma"/>
+                        </a:rPr>
+                        <a:t>0.067</a:t>
+                      </a:r>
+                    </a:p>
+                  </a:txBody>
+                  <a:tcPr>
+                    <a:solidFill>
+                      <a:srgbClr val="FFFFFF"/>
+                    </a:solidFill>
+                  </a:tcPr>
+                </a:tc>
+                <a:tc>
+                  <a:txBody>
+                    <a:bodyPr wrap="square"/>
+                    <a:lstStyle/>
+                    <a:p>
+                      <a:pPr rtl="1" algn="r"/>
+                      <a:r>
+                        <a:rPr sz="1300" b="0">
+                          <a:solidFill>
+                            <a:srgbClr val="1B263B"/>
+                          </a:solidFill>
+                          <a:latin typeface="Tahoma"/>
+                        </a:rPr>
+                        <a:t>0.097</a:t>
+                      </a:r>
+                    </a:p>
+                  </a:txBody>
+                  <a:tcPr>
+                    <a:solidFill>
+                      <a:srgbClr val="FFFFFF"/>
+                    </a:solidFill>
+                  </a:tcPr>
+                </a:tc>
+              </a:tr>
+            </a:tbl>
+          </a:graphicData>
+        </a:graphic>
+      </p:graphicFrame>
+      <p:sp>
+        <p:nvSpPr>
+          <p:cNvPr id="7" name="Rounded Rectangle 6"/>
           <p:cNvSpPr/>
           <p:nvPr/>
         </p:nvSpPr>
         <p:spPr>
           <a:xfrm>
-            <a:off x="566928" y="5394960"/>
+            <a:off x="566928" y="5806440"/>
             <a:ext cx="11055096" cy="685800"/>
           </a:xfrm>
           <a:prstGeom prst="roundRect">
@@ -9920,14 +10803,14 @@
                 </a:solidFill>
                 <a:latin typeface="Tahoma"/>
               </a:rPr>
-              <a:t>این محدودیت‌ها جهت‌گیری کارهای آینده را مشخص می‌کنند.</a:t>
-            </a:r>
-          </a:p>
-        </p:txBody>
-      </p:sp>
-      <p:sp>
-        <p:nvSpPr>
-          <p:cNvPr id="6" name="TextBox 5"/>
+              <a:t>شواهد منبع-مجری حدود ۲٫۸ برابر یادآوری فلاوندر را با دقتی بالاتر و بدون هیچ فراخوانی مدل به دست می‌آورد.</a:t>
+            </a:r>
+          </a:p>
+        </p:txBody>
+      </p:sp>
+      <p:sp>
+        <p:nvSpPr>
+          <p:cNvPr id="8" name="TextBox 7"/>
           <p:cNvSpPr txBox="1"/>
           <p:nvPr/>
         </p:nvSpPr>
@@ -10052,7 +10935,7 @@
                 </a:solidFill>
                 <a:latin typeface="Tahoma"/>
               </a:rPr>
-              <a:t>کارهای آینده</a:t>
+              <a:t>محدودیت‌ها</a:t>
             </a:r>
           </a:p>
         </p:txBody>
@@ -10088,13 +10971,13 @@
               </a:spcAft>
             </a:pPr>
             <a:r>
-              <a:rPr sz="1700">
+              <a:rPr sz="1600">
                 <a:solidFill>
                   <a:srgbClr val="1B263B"/>
                 </a:solidFill>
                 <a:latin typeface="Tahoma"/>
               </a:rPr>
-              <a:t>•  بستهٔ شواهد به‌جای قطعهٔ ثابت کد، مسیر دادهٔ میان منبع و نقطهٔ خطر را بدهد؛ گلوگاه اصلی همین است.</a:t>
+              <a:t>•  اندازهٔ نمونه: تعداد یافته‌های درست در پیکربندی‌های ترکیبی کوچک است (۳ تا ۵)، پس نرخ‌ها حساس‌اند.</a:t>
             </a:r>
           </a:p>
           <a:p>
@@ -10107,13 +10990,13 @@
               </a:spcAft>
             </a:pPr>
             <a:r>
-              <a:rPr sz="1700">
+              <a:rPr sz="1600">
                 <a:solidFill>
                   <a:srgbClr val="1B263B"/>
                 </a:solidFill>
                 <a:latin typeface="Tahoma"/>
               </a:rPr>
-              <a:t>•  استفاده از خروجی نامطمئن به‌جای دور انداختن آن: ۴۲٪ گروه‌ها در C نامطمئن بودند و این یعنی سیگنال از دست‌رفته.</a:t>
+              <a:t>•  مجموعه‌داده: کد جولیت قالب‌محور و کوتاه است؛ ارزیابی روی دیویگن همین ضعف را تا حدی جبران می‌کند اما برچسب آن نیز پرلایه است.</a:t>
             </a:r>
           </a:p>
           <a:p>
@@ -10126,13 +11009,13 @@
               </a:spcAft>
             </a:pPr>
             <a:r>
-              <a:rPr sz="1700">
+              <a:rPr sz="1600">
                 <a:solidFill>
                   <a:srgbClr val="1B263B"/>
                 </a:solidFill>
                 <a:latin typeface="Tahoma"/>
               </a:rPr>
-              <a:t>•  تنظیم نقطهٔ کاری بر پایهٔ هزینهٔ نسبی خطا، با آستانهٔ متفاوت برای تأیید.</a:t>
+              <a:t>•  موتور مسیر درون‌روشی است؛ پیوند میان توابع هنوز پیاده‌سازی نشده است.</a:t>
             </a:r>
           </a:p>
           <a:p>
@@ -10145,13 +11028,13 @@
               </a:spcAft>
             </a:pPr>
             <a:r>
-              <a:rPr sz="1700">
+              <a:rPr sz="1600">
                 <a:solidFill>
                   <a:srgbClr val="1B263B"/>
                 </a:solidFill>
                 <a:latin typeface="Tahoma"/>
               </a:rPr>
-              <a:t>•  ارزیابی روی مجموعه‌داده‌های دیگر و کد واقعی بلندتر با وابستگی بین‌فایلی.</a:t>
+              <a:t>•  مدل: ارزیابی تنها روی یک مدل زبانی انجام شده و تعمیم نیازمند آزمایش تکمیلی است.</a:t>
             </a:r>
           </a:p>
           <a:p>
@@ -10164,20 +11047,75 @@
               </a:spcAft>
             </a:pPr>
             <a:r>
-              <a:rPr sz="1700">
+              <a:rPr sz="1600">
                 <a:solidFill>
                   <a:srgbClr val="1B263B"/>
                 </a:solidFill>
                 <a:latin typeface="Tahoma"/>
               </a:rPr>
-              <a:t>•  توسعهٔ بازبینی تک‌مرحله‌ای به عامل چندمرحله‌ای با ابزار پرس‌وجو.</a:t>
-            </a:r>
-          </a:p>
-        </p:txBody>
-      </p:sp>
-      <p:sp>
-        <p:nvSpPr>
-          <p:cNvPr id="5" name="TextBox 4"/>
+              <a:t>•  سیاست تطبیق: چون برچسب خط در مجموعه‌داده ثبت نشده، تطبیق بر پایهٔ فایل و خانوادهٔ CWE است و تا حدی سخاوتمندانه.</a:t>
+            </a:r>
+          </a:p>
+        </p:txBody>
+      </p:sp>
+      <p:sp>
+        <p:nvSpPr>
+          <p:cNvPr id="5" name="Rounded Rectangle 4"/>
+          <p:cNvSpPr/>
+          <p:nvPr/>
+        </p:nvSpPr>
+        <p:spPr>
+          <a:xfrm>
+            <a:off x="566928" y="5394960"/>
+            <a:ext cx="11055096" cy="685800"/>
+          </a:xfrm>
+          <a:prstGeom prst="roundRect">
+            <a:avLst/>
+          </a:prstGeom>
+          <a:solidFill>
+            <a:srgbClr val="E3EFF6"/>
+          </a:solidFill>
+          <a:ln w="12700">
+            <a:solidFill>
+              <a:srgbClr val="0F628B"/>
+            </a:solidFill>
+          </a:ln>
+          <a:effectLst/>
+        </p:spPr>
+        <p:style>
+          <a:lnRef idx="1">
+            <a:schemeClr val="accent1"/>
+          </a:lnRef>
+          <a:fillRef idx="3">
+            <a:schemeClr val="accent1"/>
+          </a:fillRef>
+          <a:effectRef idx="2">
+            <a:schemeClr val="accent1"/>
+          </a:effectRef>
+          <a:fontRef idx="minor">
+            <a:schemeClr val="lt1"/>
+          </a:fontRef>
+        </p:style>
+        <p:txBody>
+          <a:bodyPr rtlCol="0" anchor="ctr" wrap="square"/>
+          <a:lstStyle/>
+          <a:p>
+            <a:pPr algn="ctr" rtl="1"/>
+            <a:r>
+              <a:rPr sz="1500" b="1">
+                <a:solidFill>
+                  <a:srgbClr val="1B263B"/>
+                </a:solidFill>
+                <a:latin typeface="Tahoma"/>
+              </a:rPr>
+              <a:t>این محدودیت‌ها جهت‌گیری کارهای آینده را مشخص می‌کنند.</a:t>
+            </a:r>
+          </a:p>
+        </p:txBody>
+      </p:sp>
+      <p:sp>
+        <p:nvSpPr>
+          <p:cNvPr id="6" name="TextBox 5"/>
           <p:cNvSpPr txBox="1"/>
           <p:nvPr/>
         </p:nvSpPr>
@@ -10571,75 +11509,20 @@
                 </a:solidFill>
                 <a:latin typeface="Tahoma"/>
               </a:rPr>
-              <a:t>جمع‌بندی</a:t>
-            </a:r>
-          </a:p>
-        </p:txBody>
-      </p:sp>
-      <p:sp>
-        <p:nvSpPr>
-          <p:cNvPr id="4" name="Rounded Rectangle 3"/>
-          <p:cNvSpPr/>
-          <p:nvPr/>
-        </p:nvSpPr>
-        <p:spPr>
-          <a:xfrm>
-            <a:off x="566928" y="1645920"/>
-            <a:ext cx="11055096" cy="1234440"/>
-          </a:xfrm>
-          <a:prstGeom prst="roundRect">
-            <a:avLst/>
-          </a:prstGeom>
-          <a:solidFill>
-            <a:srgbClr val="E3EFF6"/>
-          </a:solidFill>
-          <a:ln w="12700">
-            <a:solidFill>
-              <a:srgbClr val="0F628B"/>
-            </a:solidFill>
-          </a:ln>
-          <a:effectLst/>
-        </p:spPr>
-        <p:style>
-          <a:lnRef idx="1">
-            <a:schemeClr val="accent1"/>
-          </a:lnRef>
-          <a:fillRef idx="3">
-            <a:schemeClr val="accent1"/>
-          </a:fillRef>
-          <a:effectRef idx="2">
-            <a:schemeClr val="accent1"/>
-          </a:effectRef>
-          <a:fontRef idx="minor">
-            <a:schemeClr val="lt1"/>
-          </a:fontRef>
-        </p:style>
-        <p:txBody>
-          <a:bodyPr rtlCol="0" anchor="ctr" wrap="square"/>
-          <a:lstStyle/>
-          <a:p>
-            <a:pPr algn="ctr" rtl="1"/>
-            <a:r>
-              <a:rPr sz="1800" b="1">
-                <a:solidFill>
-                  <a:srgbClr val="1B263B"/>
-                </a:solidFill>
-                <a:latin typeface="Tahoma"/>
-              </a:rPr>
-              <a:t>بازبینی مبتنی بر شواهد، هشدارهای نادرست تحلیل ایستا را به‌طور چشمگیری کاهش می‌دهد، اما این کاهش رایگان نیست؛ افزودن شواهد ساختاری این مبادله را به نقطهٔ کاری متعادل‌تری می‌رساند.</a:t>
-            </a:r>
-          </a:p>
-        </p:txBody>
-      </p:sp>
-      <p:sp>
-        <p:nvSpPr>
-          <p:cNvPr id="5" name="TextBox 4"/>
+              <a:t>کارهای آینده</a:t>
+            </a:r>
+          </a:p>
+        </p:txBody>
+      </p:sp>
+      <p:sp>
+        <p:nvSpPr>
+          <p:cNvPr id="4" name="TextBox 3"/>
           <p:cNvSpPr txBox="1"/>
           <p:nvPr/>
         </p:nvSpPr>
         <p:spPr>
           <a:xfrm>
-            <a:off x="566928" y="3200400"/>
+            <a:off x="566928" y="1600200"/>
             <a:ext cx="11057839" cy="4"/>
           </a:xfrm>
           <a:prstGeom prst="rect">
@@ -10668,7 +11551,7 @@
                 </a:solidFill>
                 <a:latin typeface="Tahoma"/>
               </a:rPr>
-              <a:t>•  کاهش ۸۷٪ هشدار نادرست با دقت بالاتر (۰٫۶۰۰ در برابر ۰٫۳۷۹).</a:t>
+              <a:t>•  بستهٔ شواهد به‌جای قطعهٔ ثابت کد، مسیر دادهٔ میان منبع و نقطهٔ خطر را بدهد؛ گلوگاه اصلی همین است.</a:t>
             </a:r>
           </a:p>
           <a:p>
@@ -10687,7 +11570,7 @@
                 </a:solidFill>
                 <a:latin typeface="Tahoma"/>
               </a:rPr>
-              <a:t>•  افزودن شواهد ساختاری: یادآوری ۱٫۰٪ ⟵ ۱٫۷٪ و تأییدها ۵ ⟵ ۱۱.</a:t>
+              <a:t>•  استفاده از خروجی نامطمئن به‌جای دور انداختن آن: ۴۲٪ گروه‌ها در C نامطمئن بودند و این یعنی سیگنال از دست‌رفته.</a:t>
             </a:r>
           </a:p>
           <a:p>
@@ -10706,7 +11589,7 @@
                 </a:solidFill>
                 <a:latin typeface="Tahoma"/>
               </a:rPr>
-              <a:t>•  پوشش هیچ ابزار ایستایی به‌تنهایی کافی نیست: صفر یافته در سرریز عدد صحیح.</a:t>
+              <a:t>•  تنظیم نقطهٔ کاری بر پایهٔ هزینهٔ نسبی خطا، با آستانهٔ متفاوت برای تأیید.</a:t>
             </a:r>
           </a:p>
           <a:p>
@@ -10725,14 +11608,33 @@
                 </a:solidFill>
                 <a:latin typeface="Tahoma"/>
               </a:rPr>
-              <a:t>•  خروجی سامانه، گزارشی است که برای هر یافته دلیل و شاهد می‌آورد؛ نه فهرست طولانی هشدارها.</a:t>
-            </a:r>
-          </a:p>
-        </p:txBody>
-      </p:sp>
-      <p:sp>
-        <p:nvSpPr>
-          <p:cNvPr id="6" name="TextBox 5"/>
+              <a:t>•  ارزیابی روی مجموعه‌داده‌های دیگر و کد واقعی بلندتر با وابستگی بین‌فایلی.</a:t>
+            </a:r>
+          </a:p>
+          <a:p>
+            <a:pPr rtl="1" algn="r">
+              <a:lnSpc>
+                <a:spcPct val="140000"/>
+              </a:lnSpc>
+              <a:spcAft>
+                <a:spcPts val="1200"/>
+              </a:spcAft>
+            </a:pPr>
+            <a:r>
+              <a:rPr sz="1700">
+                <a:solidFill>
+                  <a:srgbClr val="1B263B"/>
+                </a:solidFill>
+                <a:latin typeface="Tahoma"/>
+              </a:rPr>
+              <a:t>•  توسعهٔ بازبینی تک‌مرحله‌ای به عامل چندمرحله‌ای با ابزار پرس‌وجو.</a:t>
+            </a:r>
+          </a:p>
+        </p:txBody>
+      </p:sp>
+      <p:sp>
+        <p:nvSpPr>
+          <p:cNvPr id="5" name="TextBox 4"/>
           <p:cNvSpPr txBox="1"/>
           <p:nvPr/>
         </p:nvSpPr>
@@ -10792,6 +11694,292 @@
         <p:spPr>
           <a:xfrm>
             <a:off x="0" y="0"/>
+            <a:ext cx="12191695" cy="932688"/>
+          </a:xfrm>
+          <a:prstGeom prst="rect">
+            <a:avLst/>
+          </a:prstGeom>
+          <a:solidFill>
+            <a:srgbClr val="0F628B"/>
+          </a:solidFill>
+          <a:ln>
+            <a:noFill/>
+          </a:ln>
+          <a:effectLst/>
+        </p:spPr>
+        <p:style>
+          <a:lnRef idx="1">
+            <a:schemeClr val="accent1"/>
+          </a:lnRef>
+          <a:fillRef idx="3">
+            <a:schemeClr val="accent1"/>
+          </a:fillRef>
+          <a:effectRef idx="2">
+            <a:schemeClr val="accent1"/>
+          </a:effectRef>
+          <a:fontRef idx="minor">
+            <a:schemeClr val="lt1"/>
+          </a:fontRef>
+        </p:style>
+        <p:txBody>
+          <a:bodyPr rtlCol="0" anchor="ctr"/>
+          <a:lstStyle/>
+          <a:p>
+            <a:pPr algn="ctr"/>
+          </a:p>
+        </p:txBody>
+      </p:sp>
+      <p:sp>
+        <p:nvSpPr>
+          <p:cNvPr id="3" name="TextBox 2"/>
+          <p:cNvSpPr txBox="1"/>
+          <p:nvPr/>
+        </p:nvSpPr>
+        <p:spPr>
+          <a:xfrm>
+            <a:off x="566928" y="146304"/>
+            <a:ext cx="11057839" cy="658368"/>
+          </a:xfrm>
+          <a:prstGeom prst="rect">
+            <a:avLst/>
+          </a:prstGeom>
+          <a:noFill/>
+        </p:spPr>
+        <p:txBody>
+          <a:bodyPr wrap="square" anchor="ctr">
+            <a:spAutoFit/>
+          </a:bodyPr>
+          <a:lstStyle/>
+          <a:p>
+            <a:pPr rtl="1" algn="r"/>
+            <a:r>
+              <a:rPr sz="2700" b="1">
+                <a:solidFill>
+                  <a:srgbClr val="FFFFFF"/>
+                </a:solidFill>
+                <a:latin typeface="Tahoma"/>
+              </a:rPr>
+              <a:t>جمع‌بندی</a:t>
+            </a:r>
+          </a:p>
+        </p:txBody>
+      </p:sp>
+      <p:sp>
+        <p:nvSpPr>
+          <p:cNvPr id="4" name="Rounded Rectangle 3"/>
+          <p:cNvSpPr/>
+          <p:nvPr/>
+        </p:nvSpPr>
+        <p:spPr>
+          <a:xfrm>
+            <a:off x="566928" y="1645920"/>
+            <a:ext cx="11055096" cy="1234440"/>
+          </a:xfrm>
+          <a:prstGeom prst="roundRect">
+            <a:avLst/>
+          </a:prstGeom>
+          <a:solidFill>
+            <a:srgbClr val="E3EFF6"/>
+          </a:solidFill>
+          <a:ln w="12700">
+            <a:solidFill>
+              <a:srgbClr val="0F628B"/>
+            </a:solidFill>
+          </a:ln>
+          <a:effectLst/>
+        </p:spPr>
+        <p:style>
+          <a:lnRef idx="1">
+            <a:schemeClr val="accent1"/>
+          </a:lnRef>
+          <a:fillRef idx="3">
+            <a:schemeClr val="accent1"/>
+          </a:fillRef>
+          <a:effectRef idx="2">
+            <a:schemeClr val="accent1"/>
+          </a:effectRef>
+          <a:fontRef idx="minor">
+            <a:schemeClr val="lt1"/>
+          </a:fontRef>
+        </p:style>
+        <p:txBody>
+          <a:bodyPr rtlCol="0" anchor="ctr" wrap="square"/>
+          <a:lstStyle/>
+          <a:p>
+            <a:pPr algn="ctr" rtl="1"/>
+            <a:r>
+              <a:rPr sz="1800" b="1">
+                <a:solidFill>
+                  <a:srgbClr val="1B263B"/>
+                </a:solidFill>
+                <a:latin typeface="Tahoma"/>
+              </a:rPr>
+              <a:t>بازبینی مبتنی بر شواهد، هشدارهای نادرست تحلیل ایستا را به‌طور چشمگیری کاهش می‌دهد، اما این کاهش رایگان نیست؛ افزودن شواهد ساختاری این مبادله را به نقطهٔ کاری متعادل‌تری می‌رساند.</a:t>
+            </a:r>
+          </a:p>
+        </p:txBody>
+      </p:sp>
+      <p:sp>
+        <p:nvSpPr>
+          <p:cNvPr id="5" name="TextBox 4"/>
+          <p:cNvSpPr txBox="1"/>
+          <p:nvPr/>
+        </p:nvSpPr>
+        <p:spPr>
+          <a:xfrm>
+            <a:off x="566928" y="3200400"/>
+            <a:ext cx="11057839" cy="4"/>
+          </a:xfrm>
+          <a:prstGeom prst="rect">
+            <a:avLst/>
+          </a:prstGeom>
+          <a:noFill/>
+        </p:spPr>
+        <p:txBody>
+          <a:bodyPr wrap="square">
+            <a:spAutoFit/>
+          </a:bodyPr>
+          <a:lstStyle/>
+          <a:p>
+            <a:pPr rtl="1" algn="r">
+              <a:lnSpc>
+                <a:spcPct val="140000"/>
+              </a:lnSpc>
+              <a:spcAft>
+                <a:spcPts val="1200"/>
+              </a:spcAft>
+            </a:pPr>
+            <a:r>
+              <a:rPr sz="1700">
+                <a:solidFill>
+                  <a:srgbClr val="1B263B"/>
+                </a:solidFill>
+                <a:latin typeface="Tahoma"/>
+              </a:rPr>
+              <a:t>•  کاهش ۸۷٪ هشدار نادرست با دقت بالاتر (۰٫۶۰۰ در برابر ۰٫۳۷۹).</a:t>
+            </a:r>
+          </a:p>
+          <a:p>
+            <a:pPr rtl="1" algn="r">
+              <a:lnSpc>
+                <a:spcPct val="140000"/>
+              </a:lnSpc>
+              <a:spcAft>
+                <a:spcPts val="1200"/>
+              </a:spcAft>
+            </a:pPr>
+            <a:r>
+              <a:rPr sz="1700">
+                <a:solidFill>
+                  <a:srgbClr val="1B263B"/>
+                </a:solidFill>
+                <a:latin typeface="Tahoma"/>
+              </a:rPr>
+              <a:t>•  افزودن شواهد ساختاری: یادآوری ۱٫۰٪ ⟵ ۱٫۷٪ و تأییدها ۵ ⟵ ۱۱.</a:t>
+            </a:r>
+          </a:p>
+          <a:p>
+            <a:pPr rtl="1" algn="r">
+              <a:lnSpc>
+                <a:spcPct val="140000"/>
+              </a:lnSpc>
+              <a:spcAft>
+                <a:spcPts val="1200"/>
+              </a:spcAft>
+            </a:pPr>
+            <a:r>
+              <a:rPr sz="1700">
+                <a:solidFill>
+                  <a:srgbClr val="1B263B"/>
+                </a:solidFill>
+                <a:latin typeface="Tahoma"/>
+              </a:rPr>
+              <a:t>•  پوشش هیچ ابزار ایستایی به‌تنهایی کافی نیست: صفر یافته در سرریز عدد صحیح.</a:t>
+            </a:r>
+          </a:p>
+          <a:p>
+            <a:pPr rtl="1" algn="r">
+              <a:lnSpc>
+                <a:spcPct val="140000"/>
+              </a:lnSpc>
+              <a:spcAft>
+                <a:spcPts val="1200"/>
+              </a:spcAft>
+            </a:pPr>
+            <a:r>
+              <a:rPr sz="1700">
+                <a:solidFill>
+                  <a:srgbClr val="1B263B"/>
+                </a:solidFill>
+                <a:latin typeface="Tahoma"/>
+              </a:rPr>
+              <a:t>•  خروجی سامانه، گزارشی است که برای هر یافته دلیل و شاهد می‌آورد؛ نه فهرست طولانی هشدارها.</a:t>
+            </a:r>
+          </a:p>
+        </p:txBody>
+      </p:sp>
+      <p:sp>
+        <p:nvSpPr>
+          <p:cNvPr id="6" name="TextBox 5"/>
+          <p:cNvSpPr txBox="1"/>
+          <p:nvPr/>
+        </p:nvSpPr>
+        <p:spPr>
+          <a:xfrm>
+            <a:off x="566928" y="6382512"/>
+            <a:ext cx="11057839" cy="292608"/>
+          </a:xfrm>
+          <a:prstGeom prst="rect">
+            <a:avLst/>
+          </a:prstGeom>
+          <a:noFill/>
+        </p:spPr>
+        <p:txBody>
+          <a:bodyPr wrap="none">
+            <a:spAutoFit/>
+          </a:bodyPr>
+          <a:lstStyle/>
+          <a:p>
+            <a:pPr algn="l"/>
+            <a:r>
+              <a:rPr sz="1100">
+                <a:solidFill>
+                  <a:srgbClr val="6B7484"/>
+                </a:solidFill>
+                <a:latin typeface="Tahoma"/>
+              </a:rPr>
+              <a:t>20</a:t>
+            </a:r>
+          </a:p>
+        </p:txBody>
+      </p:sp>
+    </p:spTree>
+  </p:cSld>
+  <p:clrMapOvr>
+    <a:masterClrMapping/>
+  </p:clrMapOvr>
+</p:sld>
+</file>
+
+<file path=ppt/slides/slide22.xml><?xml version="1.0" encoding="utf-8"?>
+<p:sld xmlns:a="http://schemas.openxmlformats.org/drawingml/2006/main" xmlns:p="http://schemas.openxmlformats.org/presentationml/2006/main" xmlns:r="http://schemas.openxmlformats.org/officeDocument/2006/relationships">
+  <p:cSld>
+    <p:spTree>
+      <p:nvGrpSpPr>
+        <p:cNvPr id="1" name=""/>
+        <p:cNvGrpSpPr/>
+        <p:nvPr/>
+      </p:nvGrpSpPr>
+      <p:grpSpPr/>
+      <p:sp>
+        <p:nvSpPr>
+          <p:cNvPr id="2" name="Rectangle 1"/>
+          <p:cNvSpPr/>
+          <p:nvPr/>
+        </p:nvSpPr>
+        <p:spPr>
+          <a:xfrm>
+            <a:off x="0" y="0"/>
             <a:ext cx="12191695" cy="6858000"/>
           </a:xfrm>
           <a:prstGeom prst="rect">
@@ -12365,7 +13553,7 @@
                 </a:solidFill>
                 <a:latin typeface="Tahoma"/>
               </a:rPr>
-              <a:t>تحلیل ایستا</a:t>
+              <a:t>تحلیل ایستا و ساختاری</a:t>
             </a:r>
           </a:p>
         </p:txBody>
@@ -12420,8 +13608,8 @@
                 </a:solidFill>
                 <a:latin typeface="Tahoma"/>
               </a:rPr>
-              <a:t>cppcheck · Flawfinder
-Clang Static Analyzer</a:t>
+              <a:t>cppcheck · Flawfinder · Clang
+Tree-sitter: گره، ارجاع، پارامتر</a:t>
             </a:r>
           </a:p>
         </p:txBody>
@@ -12531,7 +13719,7 @@
                 </a:solidFill>
                 <a:latin typeface="Tahoma"/>
               </a:rPr>
-              <a:t>ادغام و همبسته‌سازی</a:t>
+              <a:t>بازیابی مسیر داده</a:t>
             </a:r>
           </a:p>
         </p:txBody>
@@ -12586,8 +13774,8 @@
                 </a:solidFill>
                 <a:latin typeface="Tahoma"/>
               </a:rPr>
-              <a:t>اثر انگشت یافته + تطبیق خط
-تبدیل به گروه‌های بازبینی</a:t>
+              <a:t>اثر انگشت یافته
+مسیر منبع ⟵ مجری (درون‌روشی)</a:t>
             </a:r>
           </a:p>
         </p:txBody>
@@ -12697,7 +13885,7 @@
                 </a:solidFill>
                 <a:latin typeface="Tahoma"/>
               </a:rPr>
-              <a:t>بازبینی مبتنی بر شواهد</a:t>
+              <a:t>داوری چندعامله</a:t>
             </a:r>
           </a:p>
         </p:txBody>
@@ -12752,8 +13940,8 @@
                 </a:solidFill>
                 <a:latin typeface="Tahoma"/>
               </a:rPr>
-              <a:t>بستهٔ شواهد ساخت‌یافته
-تصمیم: تأیید / رد / عدم قطعیت</a:t>
+              <a:t>Scanner: فرضیه
+Verifier: تأیید / رد</a:t>
             </a:r>
           </a:p>
         </p:txBody>
@@ -12883,7 +14071,26 @@
                 </a:solidFill>
                 <a:latin typeface="Tahoma"/>
               </a:rPr>
-              <a:t>•  خروجی نهایی: تنها یافته‌های تأییدشده، همراه با دلیل و شواهد — نه فهرست طولانی هشدارها.</a:t>
+              <a:t>•  بستهٔ شواهد هر فرضیه پیش از داوری ساخته می‌شود: مسیر منبع-مجری، یافتهٔ ابزارهای مجاور، و قطعهٔ کد.</a:t>
+            </a:r>
+          </a:p>
+          <a:p>
+            <a:pPr rtl="1" algn="r">
+              <a:lnSpc>
+                <a:spcPct val="140000"/>
+              </a:lnSpc>
+              <a:spcAft>
+                <a:spcPts val="1200"/>
+              </a:spcAft>
+            </a:pPr>
+            <a:r>
+              <a:rPr sz="1700">
+                <a:solidFill>
+                  <a:srgbClr val="1B263B"/>
+                </a:solidFill>
+                <a:latin typeface="Tahoma"/>
+              </a:rPr>
+              <a:t>•  خروجی نهایی: تنها یافته‌های تأییدشده، همراه با شواهد — نه فهرست طولانی هشدارها.</a:t>
             </a:r>
           </a:p>
         </p:txBody>
@@ -13567,7 +14774,7 @@
                 </a:solidFill>
                 <a:latin typeface="Tahoma"/>
               </a:rPr>
-              <a:t>فاز ۳: بازبینی مبتنی بر شواهد</a:t>
+              <a:t>فاز ۳: داوری چندعامله</a:t>
             </a:r>
           </a:p>
         </p:txBody>
@@ -13602,7 +14809,7 @@
                 </a:solidFill>
                 <a:latin typeface="Tahoma"/>
               </a:rPr>
-              <a:t>بستهٔ شواهد و سه تصمیم ممکن</a:t>
+              <a:t>Scanner → Verifier</a:t>
             </a:r>
           </a:p>
         </p:txBody>
@@ -13644,7 +14851,7 @@
                 </a:solidFill>
                 <a:latin typeface="Tahoma"/>
               </a:rPr>
-              <a:t>•  بستهٔ شواهد ساخت‌یافته: قطعهٔ کد پیرامون محل هشدار، پیام ابزارها، و در پیکربندی D شواهد ساختاری از درخت نحوی.</a:t>
+              <a:t>•  Scanner: فرضیه‌های منبع-مجری را بر پایهٔ شواهد ساختاری و یافته‌های ابزارهای ایستا تولید می‌کند.</a:t>
             </a:r>
           </a:p>
           <a:p>
@@ -13663,7 +14870,7 @@
                 </a:solidFill>
                 <a:latin typeface="Tahoma"/>
               </a:rPr>
-              <a:t>•  سه خروجی ممکن: تأیید، رد، و عدم قطعیت — که صادقانه‌ترین حالت برای کمبود شاهد است.</a:t>
+              <a:t>•  Verifier: هر فرضیه را با بستهٔ شواهد می‌پذیرد و تنها در صورت تأیید زنجیرهٔ منبع-مجری (chain_verified=True) آن را تأیید می‌کند.</a:t>
             </a:r>
           </a:p>
           <a:p>
@@ -13682,7 +14889,26 @@
                 </a:solidFill>
                 <a:latin typeface="Tahoma"/>
               </a:rPr>
-              <a:t>•  خروجی نهایی: یافته‌های تأییدشده، همراه با دلیل و شواهد؛ یافته‌های نامطمئن در بخش جداگانه.</a:t>
+              <a:t>•  بودجهٔ فرضیه و آستانهٔ اعتماد Verifier، کنترل دقت و هزینه را ممکن می‌سازند.</a:t>
+            </a:r>
+          </a:p>
+          <a:p>
+            <a:pPr rtl="1" algn="r">
+              <a:lnSpc>
+                <a:spcPct val="140000"/>
+              </a:lnSpc>
+              <a:spcAft>
+                <a:spcPts val="1200"/>
+              </a:spcAft>
+            </a:pPr>
+            <a:r>
+              <a:rPr sz="1700">
+                <a:solidFill>
+                  <a:srgbClr val="1B263B"/>
+                </a:solidFill>
+                <a:latin typeface="Tahoma"/>
+              </a:rPr>
+              <a:t>•  خروجی نهایی: یافته‌های تأییدشده، همراه با دلیل و شواهد؛ فرضیه‌های ردشده ثبت و گزارش می‌شوند.</a:t>
             </a:r>
           </a:p>
         </p:txBody>
@@ -13737,7 +14963,7 @@
                 </a:solidFill>
                 <a:latin typeface="Tahoma"/>
               </a:rPr>
-              <a:t>تأیید</a:t>
+              <a:t>تأیید شده</a:t>
             </a:r>
           </a:p>
         </p:txBody>
@@ -13792,7 +15018,7 @@
                 </a:solidFill>
                 <a:latin typeface="Tahoma"/>
               </a:rPr>
-              <a:t>شاهد کافی برای وجود ایراد</a:t>
+              <a:t>شاهد کافی برای وجود زنجیرهٔ داده</a:t>
             </a:r>
           </a:p>
         </p:txBody>
@@ -13847,7 +15073,7 @@
                 </a:solidFill>
                 <a:latin typeface="Tahoma"/>
               </a:rPr>
-              <a:t>رد</a:t>
+              <a:t>رد شده</a:t>
             </a:r>
           </a:p>
         </p:txBody>
